--- a/curso_es/pptx/S62.pptx
+++ b/curso_es/pptx/S62.pptx
@@ -3800,7 +3800,7 @@
                 </a:solidFill>
                 <a:latin typeface="Nunito Sans"/>
               </a:rPr>
-              <a:t>Aitor escribe: «Paso de ir al cumple de Dylan». Maialen podría contestar: «¡Qué borde eres!». Pero escribe: «¿Quieres decir que no te apetece o que no puedes?».</a:t>
+              <a:t>Un chico escribe: «Paso de ir al cumple de un compañero». Una chica podría contestar: «¡Qué borde eres!». Pero escribe: «¿Quieres decir que no te apetece o que no puedes?».</a:t>
             </a:r>
           </a:p>
         </p:txBody>
@@ -3848,7 +3848,7 @@
                 </a:solidFill>
                 <a:latin typeface="Nunito Sans"/>
               </a:rPr>
-              <a:t>Maialen no contesta a lo que ella imagina: primero comprueba.</a:t>
+              <a:t>La chica no contesta a lo que ella imagina: primero comprueba.</a:t>
             </a:r>
           </a:p>
           <a:p>
@@ -3873,7 +3873,7 @@
                 </a:solidFill>
                 <a:latin typeface="Nunito Sans"/>
               </a:rPr>
-              <a:t>Reformula: pone dos formas de entender lo que dice Aitor.</a:t>
+              <a:t>Reformula: pone dos formas de entender lo que dice el chico.</a:t>
             </a:r>
           </a:p>
           <a:p>
@@ -3898,7 +3898,7 @@
                 </a:solidFill>
                 <a:latin typeface="Nunito Sans"/>
               </a:rPr>
-              <a:t>Aitor responde: «No puedo, tengo partido». No era borde.</a:t>
+              <a:t>El chico responde: «No puedo, tengo partido». No era borde.</a:t>
             </a:r>
           </a:p>
           <a:p>
@@ -4109,7 +4109,7 @@
                 </a:solidFill>
                 <a:latin typeface="Nunito Sans"/>
               </a:rPr>
-              <a:t>Chen le dice a su padre: «Necesito un móvil nuevo». Su padre, en lugar de decir que no, pregunta: «¿Por qué? ¿Qué le pasa al tuyo?».</a:t>
+              <a:t>Un chico le dice a su padre: «Necesito un móvil nuevo». Su padre, en lugar de decir que no, pregunta: «¿Por qué? ¿Qué le pasa al tuyo?».</a:t>
             </a:r>
           </a:p>
         </p:txBody>
@@ -4182,7 +4182,7 @@
                 </a:solidFill>
                 <a:latin typeface="Nunito Sans"/>
               </a:rPr>
-              <a:t>Chen tiene que pensar: «La batería no me dura ni media mañana».</a:t>
+              <a:t>El chico tiene que pensar: «La batería no me dura ni media mañana».</a:t>
             </a:r>
           </a:p>
           <a:p>
@@ -4418,7 +4418,7 @@
                 </a:solidFill>
                 <a:latin typeface="Nunito Sans"/>
               </a:rPr>
-              <a:t>Omar dice que le gusta una serie. Dylan le suelta: «¿Por qué? ¿Cómo lo sabes? ¿Seguro? ¿Y eso por qué?», sin esperar las respuestas, para dejarle en ridículo.</a:t>
+              <a:t>Un chico dice que le gusta una serie. Otro chico le suelta: «¿Por qué? ¿Cómo lo sabes? ¿Seguro? ¿Y eso por qué?», sin esperar las respuestas, para dejarle en ridículo.</a:t>
             </a:r>
           </a:p>
         </p:txBody>
@@ -4466,7 +4466,7 @@
                 </a:solidFill>
                 <a:latin typeface="Nunito Sans"/>
               </a:rPr>
-              <a:t>Dylan pide razones todo el rato. ¿Está dialogando bien?</a:t>
+              <a:t>Ese chico pide razones todo el rato. ¿Está dialogando bien?</a:t>
             </a:r>
           </a:p>
           <a:p>
@@ -4541,7 +4541,7 @@
                 </a:solidFill>
                 <a:latin typeface="Nunito Sans"/>
               </a:rPr>
-              <a:t>Además, «me gusta» es un gusto: habla de Omar y no hay que demostrarlo (sesión 2).</a:t>
+              <a:t>Además, «me gusta» es un gusto: habla del primero y no hay que demostrarlo (sesión 2).</a:t>
             </a:r>
           </a:p>
           <a:p>
@@ -6694,7 +6694,7 @@
                 </a:solidFill>
                 <a:latin typeface="Nunito Sans"/>
               </a:rPr>
-              <a:t>Naiara manda un audio de dos minutos. Kevin lo escucha a doble velocidad, mientras juega, y contesta: «Ya, pero…».</a:t>
+              <a:t>Una chica manda un audio de dos minutos. Un chico lo escucha a doble velocidad, mientras juega, y contesta: «Ya, pero…».</a:t>
             </a:r>
           </a:p>
         </p:txBody>
@@ -6733,7 +6733,7 @@
                 </a:solidFill>
                 <a:latin typeface="Nunito Sans"/>
               </a:rPr>
-              <a:t>¿Ha escuchado Kevin a Naiara?</a:t>
+              <a:t>¿Ha escuchado ese chico a la chica?</a:t>
             </a:r>
           </a:p>
         </p:txBody>
